--- a/public/fun/pack/pptx/birthdaypro/돌잔치프리미엄_08_사진중심_아이스블루.pptx
+++ b/public/fun/pack/pptx/birthdaypro/돌잔치프리미엄_08_사진중심_아이스블루.pptx
@@ -112,12 +112,12 @@
   <p:extLst>
     <p:ext uri="{521415D9-36F7-43E2-AB2F-B90AF26B5E84}">
       <p14:sectionLst xmlns:p14="http://schemas.microsoft.com/office/powerpoint/2010/main">
-        <p14:section name="시작" id="{4299967A-8EFD-4CA9-A809-30E73F10A02C}">
+        <p14:section name="시작" id="{5C02E016-9624-4C77-A850-5D42D1C33764}">
           <p14:sldIdLst>
             <p14:sldId id="256"/>
           </p14:sldIdLst>
         </p14:section>
-        <p14:section name="본문" id="{5CC2672A-E63D-49A0-965C-9248BA1E1314}">
+        <p14:section name="본문" id="{69ABC5E3-3E96-4CC5-9191-80B719B27773}">
           <p14:sldIdLst>
             <p14:sldId id="257"/>
             <p14:sldId id="258"/>
@@ -125,7 +125,7 @@
             <p14:sldId id="260"/>
           </p14:sldIdLst>
         </p14:section>
-        <p14:section name="마무리" id="{6AA720C8-85C6-45E3-85B7-2232BB82D9C3}">
+        <p14:section name="마무리" id="{EED27633-4479-488D-B04D-D9F23060EB36}">
           <p14:sldIdLst>
             <p14:sldId id="261"/>
           </p14:sldIdLst>
@@ -1469,7 +1469,7 @@
             </a:lvl1pPr>
           </a:lstStyle>
           <a:p>
-            <a:fld id="{CB7232DE-5265-48D3-B550-33958BC6374C}" type="slidenum">
+            <a:fld id="{D089A74D-8BC4-468F-8A2A-A824BABBDDCE}" type="slidenum">
               <a:rPr lang="en-US"/>
               <a:t>‹#›</a:t>
             </a:fld>
@@ -2084,7 +2084,7 @@
             </a:lvl1pPr>
           </a:lstStyle>
           <a:p>
-            <a:fld id="{EEFAA14C-43BE-4E34-808E-12564FF4EA14}" type="slidenum">
+            <a:fld id="{C3E9426A-FC50-4D9E-9DD5-B571A0736577}" type="slidenum">
               <a:rPr lang="en-US"/>
               <a:t>‹#›</a:t>
             </a:fld>
@@ -2673,7 +2673,7 @@
             </a:lvl1pPr>
           </a:lstStyle>
           <a:p>
-            <a:fld id="{FE3A02A2-09DD-446C-A1D0-4637333905E2}" type="slidenum">
+            <a:fld id="{EF2CF456-B75D-4BFE-84C9-74F59548964E}" type="slidenum">
               <a:rPr lang="en-US"/>
               <a:t>‹#›</a:t>
             </a:fld>
@@ -3476,7 +3476,7 @@
           <a:p>
             <a:r>
               <a:rPr lang="ko-KR"/>
-              <a:t>아기 이름 · 0000. 00. 00</a:t>
+              <a:t>아기 이름 · 날짜 입력</a:t>
             </a:r>
           </a:p>
           <a:p>
@@ -3639,7 +3639,7 @@
           <a:bodyPr/>
           <a:lstStyle/>
           <a:p>
-            <a:fld id="{CEB04CE3-2BAD-417B-BFB8-12BD10791811}" type="slidenum">
+            <a:fld id="{136F696E-C409-4C10-8F07-EA24B7F9A659}" type="slidenum">
               <a:rPr lang="en-US"/>
               <a:t>‹#›</a:t>
             </a:fld>
@@ -4379,7 +4379,7 @@
           <a:bodyPr/>
           <a:lstStyle/>
           <a:p>
-            <a:fld id="{5F0CC10B-2D23-4909-9915-3BBBE9054FD0}" type="slidenum">
+            <a:fld id="{4103EBBE-36CC-40F1-87B7-DE528CFE4913}" type="slidenum">
               <a:rPr lang="en-US"/>
               <a:t>‹#›</a:t>
             </a:fld>
@@ -4467,7 +4467,7 @@
           <a:bodyPr/>
           <a:lstStyle/>
           <a:p>
-            <a:fld id="{15BFC10D-A275-4329-BA67-750F8C94DD6D}" type="slidenum">
+            <a:fld id="{7CCB834D-186E-4CA0-BCAF-B9291445D4C2}" type="slidenum">
               <a:rPr lang="en-US"/>
               <a:t>‹#›</a:t>
             </a:fld>
@@ -5848,7 +5848,7 @@
           <a:bodyPr/>
           <a:lstStyle/>
           <a:p>
-            <a:fld id="{5F6B1CC1-AC71-4FBF-950B-1761484340AD}" type="slidenum">
+            <a:fld id="{FF462D4C-E0C9-43EE-9C65-92984800654A}" type="slidenum">
               <a:rPr lang="en-US"/>
               <a:t>‹#›</a:t>
             </a:fld>
